--- a/slides/Practitioner Workshop Deck - Paired Engineering with AI.pptx
+++ b/slides/Practitioner Workshop Deck - Paired Engineering with AI.pptx
@@ -895,7 +895,7 @@
           </a:p>
           <a:p>
             <a:r>
-              <a:t>Point participants toward the durable notes. This helps the workshop function as an entry point into the larger body of work rather than a standalone event.</a:t>
+              <a:t>Point participants toward the durable notes. This helps the workshop function as an entry point into the broader project materials rather than a standalone event.</a:t>
             </a:r>
           </a:p>
           <a:p>
@@ -4752,7 +4752,7 @@
                 </a:solidFill>
                 <a:latin typeface="Aptos"/>
               </a:rPr>
-              <a:t>Paired Engineering. A practical operating model for AI enablement in software delivery.</a:t>
+              <a:t>Paired Engineering. A practical delivery model for AI-enabled software teams.</a:t>
             </a:r>
           </a:p>
         </p:txBody>
@@ -5137,7 +5137,7 @@
                 </a:solidFill>
                 <a:latin typeface="Aptos"/>
               </a:rPr>
-              <a:t>Paired Engineering. A practical operating model for AI enablement in software delivery.</a:t>
+              <a:t>Paired Engineering. A practical delivery model for AI-enabled software teams.</a:t>
             </a:r>
           </a:p>
         </p:txBody>
@@ -5561,7 +5561,7 @@
                 </a:solidFill>
                 <a:latin typeface="Aptos"/>
               </a:rPr>
-              <a:t>Paired Engineering. A practical operating model for AI enablement in software delivery.</a:t>
+              <a:t>Paired Engineering. A practical delivery model for AI-enabled software teams.</a:t>
             </a:r>
           </a:p>
         </p:txBody>
@@ -5985,7 +5985,7 @@
                 </a:solidFill>
                 <a:latin typeface="Aptos"/>
               </a:rPr>
-              <a:t>Paired Engineering. A practical operating model for AI enablement in software delivery.</a:t>
+              <a:t>Paired Engineering. A practical delivery model for AI-enabled software teams.</a:t>
             </a:r>
           </a:p>
         </p:txBody>
@@ -6386,7 +6386,7 @@
                 </a:solidFill>
                 <a:latin typeface="Aptos"/>
               </a:rPr>
-              <a:t>Paired Engineering. A practical operating model for AI enablement in software delivery.</a:t>
+              <a:t>Paired Engineering. A practical delivery model for AI-enabled software teams.</a:t>
             </a:r>
           </a:p>
         </p:txBody>
@@ -6488,7 +6488,7 @@
                 </a:solidFill>
                 <a:latin typeface="Aptos Display"/>
               </a:rPr>
-              <a:t>The workshop is the start, not the full operating model.</a:t>
+              <a:t>The workshop is the start, not the full delivery model.</a:t>
             </a:r>
           </a:p>
         </p:txBody>
@@ -6879,7 +6879,7 @@
                 </a:solidFill>
                 <a:latin typeface="Aptos"/>
               </a:rPr>
-              <a:t>Paired Engineering. A practical operating model for AI enablement in software delivery.</a:t>
+              <a:t>Paired Engineering. A practical delivery model for AI-enabled software teams.</a:t>
             </a:r>
           </a:p>
         </p:txBody>
@@ -7280,7 +7280,7 @@
                 </a:solidFill>
                 <a:latin typeface="Aptos"/>
               </a:rPr>
-              <a:t>Paired Engineering. A practical operating model for AI enablement in software delivery.</a:t>
+              <a:t>Paired Engineering. A practical delivery model for AI-enabled software teams.</a:t>
             </a:r>
           </a:p>
         </p:txBody>
@@ -7727,7 +7727,7 @@
                 </a:solidFill>
                 <a:latin typeface="Aptos"/>
               </a:rPr>
-              <a:t>Paired Engineering. A practical operating model for AI enablement in software delivery.</a:t>
+              <a:t>Paired Engineering. A practical delivery model for AI-enabled software teams.</a:t>
             </a:r>
           </a:p>
         </p:txBody>
@@ -8128,7 +8128,7 @@
                 </a:solidFill>
                 <a:latin typeface="Aptos"/>
               </a:rPr>
-              <a:t>Paired Engineering. A practical operating model for AI enablement in software delivery.</a:t>
+              <a:t>Paired Engineering. A practical delivery model for AI-enabled software teams.</a:t>
             </a:r>
           </a:p>
         </p:txBody>
@@ -8644,7 +8644,7 @@
                 </a:solidFill>
                 <a:latin typeface="Aptos"/>
               </a:rPr>
-              <a:t>Paired Engineering. A practical operating model for AI enablement in software delivery.</a:t>
+              <a:t>Paired Engineering. A practical delivery model for AI-enabled software teams.</a:t>
             </a:r>
           </a:p>
         </p:txBody>
@@ -9091,7 +9091,7 @@
                 </a:solidFill>
                 <a:latin typeface="Aptos"/>
               </a:rPr>
-              <a:t>Paired Engineering. A practical operating model for AI enablement in software delivery.</a:t>
+              <a:t>Paired Engineering. A practical delivery model for AI-enabled software teams.</a:t>
             </a:r>
           </a:p>
         </p:txBody>
@@ -9492,7 +9492,7 @@
                 </a:solidFill>
                 <a:latin typeface="Aptos"/>
               </a:rPr>
-              <a:t>Paired Engineering. A practical operating model for AI enablement in software delivery.</a:t>
+              <a:t>Paired Engineering. A practical delivery model for AI-enabled software teams.</a:t>
             </a:r>
           </a:p>
         </p:txBody>
@@ -10008,7 +10008,7 @@
                 </a:solidFill>
                 <a:latin typeface="Aptos"/>
               </a:rPr>
-              <a:t>Paired Engineering. A practical operating model for AI enablement in software delivery.</a:t>
+              <a:t>Paired Engineering. A practical delivery model for AI-enabled software teams.</a:t>
             </a:r>
           </a:p>
         </p:txBody>
@@ -10432,7 +10432,7 @@
                 </a:solidFill>
                 <a:latin typeface="Aptos"/>
               </a:rPr>
-              <a:t>Paired Engineering. A practical operating model for AI enablement in software delivery.</a:t>
+              <a:t>Paired Engineering. A practical delivery model for AI-enabled software teams.</a:t>
             </a:r>
           </a:p>
         </p:txBody>
